--- a/media/resources/files/Onduktar_KoboytuuBingo_g5H5eNE.pptx
+++ b/media/resources/files/Onduktar_KoboytuuBingo_g5H5eNE.pptx
@@ -18404,7 +18404,7 @@
                 <a:ea typeface="+mn-ea"/>
                 <a:cs typeface="+mn-cs"/>
               </a:rPr>
-              <a:t>Турдуу пикирлер учун ыраазычылык билдиребиз.</a:t>
+              <a:t>Түрдүү пикирлер үчүн ыраазычылык билдиребиз.</a:t>
             </a:r>
           </a:p>
           <a:p>

--- a/media/resources/files/Onduktar_KoboytuuBingo_g5H5eNE.pptx
+++ b/media/resources/files/Onduktar_KoboytuuBingo_g5H5eNE.pptx
@@ -3646,7 +3646,7 @@
                 <a:ea typeface="+mn-ea"/>
                 <a:cs typeface="+mn-cs"/>
               </a:rPr>
-              <a:t>Окуучулар </a:t>
+              <a:t>Окуучулар тордон тогуз жоопту тандап, дептердеги 3х3 чакмакка каалагандай коюшат.</a:t>
             </a:r>
             <a:r>
               <a:rPr kumimoji="0" lang="ru-RU" sz="2400" b="0" i="0" u="none" strike="noStrike" kern="1200" cap="none" spc="0" normalizeH="0" baseline="0" noProof="0" dirty="0">
@@ -3663,7 +3663,7 @@
                 <a:ea typeface="+mn-ea"/>
                 <a:cs typeface="+mn-cs"/>
               </a:rPr>
-              <a:t>суроо</a:t>
+              <a:t/>
             </a:r>
             <a:r>
               <a:rPr kumimoji="0" lang="en-US" sz="2400" b="0" i="0" u="none" strike="noStrike" kern="1200" cap="none" spc="0" normalizeH="0" baseline="0" noProof="0" dirty="0">
@@ -3680,7 +3680,7 @@
                 <a:ea typeface="+mn-ea"/>
                 <a:cs typeface="+mn-cs"/>
               </a:rPr>
-              <a:t> </a:t>
+              <a:t/>
             </a:r>
             <a:r>
               <a:rPr kumimoji="0" lang="en-US" sz="2400" b="0" i="0" u="none" strike="noStrike" kern="1200" cap="none" spc="0" normalizeH="0" baseline="0" noProof="0" dirty="0" err="1">
@@ -3697,7 +3697,7 @@
                 <a:ea typeface="+mn-ea"/>
                 <a:cs typeface="+mn-cs"/>
               </a:rPr>
-              <a:t>тордон</a:t>
+              <a:t/>
             </a:r>
             <a:r>
               <a:rPr kumimoji="0" lang="en-US" sz="2400" b="0" i="0" u="none" strike="noStrike" kern="1200" cap="none" spc="0" normalizeH="0" baseline="0" noProof="0" dirty="0">
@@ -3714,7 +3714,7 @@
                 <a:ea typeface="+mn-ea"/>
                 <a:cs typeface="+mn-cs"/>
               </a:rPr>
-              <a:t> </a:t>
+              <a:t/>
             </a:r>
             <a:r>
               <a:rPr kumimoji="0" lang="en-US" sz="2000" b="0" i="0" u="none" strike="noStrike" kern="1200" cap="none" spc="0" normalizeH="0" baseline="0" noProof="0" dirty="0" err="1">
@@ -3731,7 +3731,7 @@
                 <a:ea typeface="+mn-ea"/>
                 <a:cs typeface="+mn-cs"/>
               </a:rPr>
-              <a:t>тогуз</a:t>
+              <a:t/>
             </a:r>
             <a:r>
               <a:rPr kumimoji="0" lang="en-US" sz="2000" b="0" i="0" u="none" strike="noStrike" kern="1200" cap="none" spc="0" normalizeH="0" baseline="0" noProof="0" dirty="0">
@@ -3748,7 +3748,7 @@
                 <a:ea typeface="+mn-ea"/>
                 <a:cs typeface="+mn-cs"/>
               </a:rPr>
-              <a:t> </a:t>
+              <a:t/>
             </a:r>
             <a:r>
               <a:rPr kumimoji="0" lang="en-US" sz="2000" b="0" i="0" u="none" strike="noStrike" kern="1200" cap="none" spc="0" normalizeH="0" baseline="0" noProof="0" dirty="0" err="1">
@@ -3765,7 +3765,7 @@
                 <a:ea typeface="+mn-ea"/>
                 <a:cs typeface="+mn-cs"/>
               </a:rPr>
-              <a:t>жоопту</a:t>
+              <a:t/>
             </a:r>
             <a:r>
               <a:rPr kumimoji="0" lang="en-US" sz="2000" b="0" i="0" u="none" strike="noStrike" kern="1200" cap="none" spc="0" normalizeH="0" baseline="0" noProof="0" dirty="0">
@@ -3782,7 +3782,7 @@
                 <a:ea typeface="+mn-ea"/>
                 <a:cs typeface="+mn-cs"/>
               </a:rPr>
-              <a:t> </a:t>
+              <a:t/>
             </a:r>
             <a:r>
               <a:rPr kumimoji="0" lang="en-US" sz="2000" b="0" i="0" u="none" strike="noStrike" kern="1200" cap="none" spc="0" normalizeH="0" baseline="0" noProof="0" dirty="0" err="1">
@@ -3799,7 +3799,7 @@
                 <a:ea typeface="+mn-ea"/>
                 <a:cs typeface="+mn-cs"/>
               </a:rPr>
-              <a:t>тандап</a:t>
+              <a:t/>
             </a:r>
             <a:r>
               <a:rPr kumimoji="0" lang="en-US" sz="2000" b="0" i="0" u="none" strike="noStrike" kern="1200" cap="none" spc="0" normalizeH="0" baseline="0" noProof="0" dirty="0">
@@ -3816,7 +3816,7 @@
                 <a:ea typeface="+mn-ea"/>
                 <a:cs typeface="+mn-cs"/>
               </a:rPr>
-              <a:t>, </a:t>
+              <a:t/>
             </a:r>
             <a:r>
               <a:rPr kumimoji="0" lang="en-US" sz="2000" b="0" i="0" u="none" strike="noStrike" kern="1200" cap="none" spc="0" normalizeH="0" baseline="0" noProof="0" dirty="0" err="1">
@@ -3833,7 +3833,7 @@
                 <a:ea typeface="+mn-ea"/>
                 <a:cs typeface="+mn-cs"/>
               </a:rPr>
-              <a:t>аларды</a:t>
+              <a:t/>
             </a:r>
             <a:r>
               <a:rPr kumimoji="0" lang="en-US" sz="2000" b="0" i="0" u="none" strike="noStrike" kern="1200" cap="none" spc="0" normalizeH="0" baseline="0" noProof="0" dirty="0">
@@ -3850,7 +3850,7 @@
                 <a:ea typeface="+mn-ea"/>
                 <a:cs typeface="+mn-cs"/>
               </a:rPr>
-              <a:t> </a:t>
+              <a:t/>
             </a:r>
             <a:r>
               <a:rPr kumimoji="0" lang="ru-RU" sz="2000" b="0" i="0" u="none" strike="noStrike" kern="1200" cap="none" spc="0" normalizeH="0" baseline="0" noProof="0" dirty="0">
@@ -3867,7 +3867,7 @@
                 <a:ea typeface="+mn-ea"/>
                 <a:cs typeface="+mn-cs"/>
               </a:rPr>
-              <a:t>дептериндеги</a:t>
+              <a:t/>
             </a:r>
             <a:r>
               <a:rPr kumimoji="0" lang="en-US" sz="2000" b="0" i="0" u="none" strike="noStrike" kern="1200" cap="none" spc="0" normalizeH="0" baseline="0" noProof="0" dirty="0">
@@ -3884,7 +3884,7 @@
                 <a:ea typeface="+mn-ea"/>
                 <a:cs typeface="+mn-cs"/>
               </a:rPr>
-              <a:t> 3х3 </a:t>
+              <a:t/>
             </a:r>
             <a:r>
               <a:rPr kumimoji="0" lang="en-US" sz="2000" b="0" i="0" u="none" strike="noStrike" kern="1200" cap="none" spc="0" normalizeH="0" baseline="0" noProof="0" dirty="0" err="1">
@@ -3901,7 +3901,7 @@
                 <a:ea typeface="+mn-ea"/>
                 <a:cs typeface="+mn-cs"/>
               </a:rPr>
-              <a:t>квадратка</a:t>
+              <a:t/>
             </a:r>
             <a:r>
               <a:rPr kumimoji="0" lang="en-US" sz="2000" b="0" i="0" u="none" strike="noStrike" kern="1200" cap="none" spc="0" normalizeH="0" baseline="0" noProof="0" dirty="0">
@@ -3918,7 +3918,7 @@
                 <a:ea typeface="+mn-ea"/>
                 <a:cs typeface="+mn-cs"/>
               </a:rPr>
-              <a:t> </a:t>
+              <a:t/>
             </a:r>
             <a:r>
               <a:rPr kumimoji="0" lang="en-US" sz="2000" b="0" i="0" u="none" strike="noStrike" kern="1200" cap="none" spc="0" normalizeH="0" baseline="0" noProof="0" dirty="0" err="1">
@@ -3935,7 +3935,7 @@
                 <a:ea typeface="+mn-ea"/>
                 <a:cs typeface="+mn-cs"/>
               </a:rPr>
-              <a:t>туш</a:t>
+              <a:t/>
             </a:r>
             <a:r>
               <a:rPr kumimoji="0" lang="en-US" sz="2000" b="0" i="0" u="none" strike="noStrike" kern="1200" cap="none" spc="0" normalizeH="0" baseline="0" noProof="0" dirty="0">
@@ -3952,7 +3952,7 @@
                 <a:ea typeface="+mn-ea"/>
                 <a:cs typeface="+mn-cs"/>
               </a:rPr>
-              <a:t> </a:t>
+              <a:t/>
             </a:r>
             <a:r>
               <a:rPr kumimoji="0" lang="en-US" sz="2000" b="0" i="0" u="none" strike="noStrike" kern="1200" cap="none" spc="0" normalizeH="0" baseline="0" noProof="0" dirty="0" err="1">
@@ -3969,7 +3969,7 @@
                 <a:ea typeface="+mn-ea"/>
                 <a:cs typeface="+mn-cs"/>
               </a:rPr>
-              <a:t>келди</a:t>
+              <a:t/>
             </a:r>
             <a:r>
               <a:rPr kumimoji="0" lang="en-US" sz="2000" b="0" i="0" u="none" strike="noStrike" kern="1200" cap="none" spc="0" normalizeH="0" baseline="0" noProof="0" dirty="0">
@@ -3986,7 +3986,7 @@
                 <a:ea typeface="+mn-ea"/>
                 <a:cs typeface="+mn-cs"/>
               </a:rPr>
-              <a:t> </a:t>
+              <a:t/>
             </a:r>
             <a:r>
               <a:rPr kumimoji="0" lang="en-US" sz="2000" b="0" i="0" u="none" strike="noStrike" kern="1200" cap="none" spc="0" normalizeH="0" baseline="0" noProof="0" dirty="0" err="1">
@@ -4003,7 +4003,7 @@
                 <a:ea typeface="+mn-ea"/>
                 <a:cs typeface="+mn-cs"/>
               </a:rPr>
-              <a:t>жайгаштырышы</a:t>
+              <a:t/>
             </a:r>
             <a:r>
               <a:rPr kumimoji="0" lang="en-US" sz="2000" b="0" i="0" u="none" strike="noStrike" kern="1200" cap="none" spc="0" normalizeH="0" baseline="0" noProof="0" dirty="0">
@@ -4020,7 +4020,7 @@
                 <a:ea typeface="+mn-ea"/>
                 <a:cs typeface="+mn-cs"/>
               </a:rPr>
-              <a:t> </a:t>
+              <a:t/>
             </a:r>
             <a:r>
               <a:rPr kumimoji="0" lang="en-US" sz="2000" b="0" i="0" u="none" strike="noStrike" kern="1200" cap="none" spc="0" normalizeH="0" baseline="0" noProof="0" dirty="0" err="1">
@@ -4037,7 +4037,7 @@
                 <a:ea typeface="+mn-ea"/>
                 <a:cs typeface="+mn-cs"/>
               </a:rPr>
-              <a:t>керек</a:t>
+              <a:t/>
             </a:r>
             <a:r>
               <a:rPr kumimoji="0" lang="en-US" sz="2000" b="0" i="0" u="none" strike="noStrike" kern="1200" cap="none" spc="0" normalizeH="0" baseline="0" noProof="0" dirty="0">
@@ -4054,7 +4054,7 @@
                 <a:ea typeface="+mn-ea"/>
                 <a:cs typeface="+mn-cs"/>
               </a:rPr>
-              <a:t>.</a:t>
+              <a:t/>
             </a:r>
           </a:p>
           <a:p>
@@ -5339,7 +5339,7 @@
                   <a:schemeClr val="tx1"/>
                 </a:solidFill>
               </a:rPr>
-              <a:t>0.16</a:t>
+              <a:t>0,16</a:t>
             </a:r>
           </a:p>
         </p:txBody>
@@ -5375,7 +5375,7 @@
             <a:pPr algn="ctr"/>
             <a:r>
               <a:rPr lang="en-GB" sz="8800" dirty="0"/>
-              <a:t>0.8 × 0.2</a:t>
+              <a:t>0,8 × 0,2</a:t>
             </a:r>
           </a:p>
         </p:txBody>
@@ -5663,7 +5663,7 @@
                   <a:schemeClr val="tx1"/>
                 </a:solidFill>
               </a:rPr>
-              <a:t>8.4</a:t>
+              <a:t>8,4</a:t>
             </a:r>
           </a:p>
         </p:txBody>
@@ -5699,7 +5699,7 @@
             <a:pPr algn="ctr"/>
             <a:r>
               <a:rPr lang="en-GB" sz="8800" dirty="0"/>
-              <a:t>1.2 × 7</a:t>
+              <a:t>1,2 × 7</a:t>
             </a:r>
           </a:p>
         </p:txBody>
@@ -5987,7 +5987,7 @@
                   <a:schemeClr val="tx1"/>
                 </a:solidFill>
               </a:rPr>
-              <a:t>0.18</a:t>
+              <a:t>0,18</a:t>
             </a:r>
           </a:p>
         </p:txBody>
@@ -6023,7 +6023,7 @@
             <a:pPr algn="ctr"/>
             <a:r>
               <a:rPr lang="en-GB" sz="8800" dirty="0"/>
-              <a:t>0.2 × 0.9</a:t>
+              <a:t>0,2 × 0,9</a:t>
             </a:r>
           </a:p>
         </p:txBody>
@@ -6311,7 +6311,7 @@
                   <a:schemeClr val="tx1"/>
                 </a:solidFill>
               </a:rPr>
-              <a:t>0.84</a:t>
+              <a:t>0,84</a:t>
             </a:r>
           </a:p>
         </p:txBody>
@@ -6347,7 +6347,7 @@
             <a:pPr algn="ctr"/>
             <a:r>
               <a:rPr lang="en-GB" sz="8800" dirty="0"/>
-              <a:t>0.7 × 1.2</a:t>
+              <a:t>0,7 × 1,2</a:t>
             </a:r>
           </a:p>
         </p:txBody>
@@ -6635,7 +6635,7 @@
                   <a:schemeClr val="tx1"/>
                 </a:solidFill>
               </a:rPr>
-              <a:t>0.92</a:t>
+              <a:t>0,92</a:t>
             </a:r>
           </a:p>
         </p:txBody>
@@ -6671,7 +6671,7 @@
             <a:pPr algn="ctr"/>
             <a:r>
               <a:rPr lang="en-GB" sz="8800" dirty="0"/>
-              <a:t>4.6 × 0.2</a:t>
+              <a:t>4,6 × 0,2</a:t>
             </a:r>
           </a:p>
         </p:txBody>
@@ -6959,7 +6959,7 @@
                   <a:schemeClr val="tx1"/>
                 </a:solidFill>
               </a:rPr>
-              <a:t>0.64</a:t>
+              <a:t>0,64</a:t>
             </a:r>
           </a:p>
         </p:txBody>
@@ -6995,7 +6995,7 @@
             <a:pPr algn="ctr"/>
             <a:r>
               <a:rPr lang="en-GB" sz="8800" dirty="0"/>
-              <a:t>0.2 × 3.2</a:t>
+              <a:t>0,2 × 3,2</a:t>
             </a:r>
           </a:p>
         </p:txBody>
@@ -7283,7 +7283,7 @@
                   <a:schemeClr val="tx1"/>
                 </a:solidFill>
               </a:rPr>
-              <a:t>6.3</a:t>
+              <a:t>6,3</a:t>
             </a:r>
           </a:p>
         </p:txBody>
@@ -7319,7 +7319,7 @@
             <a:pPr algn="ctr"/>
             <a:r>
               <a:rPr lang="en-GB" sz="8800" dirty="0"/>
-              <a:t>3 × 2.1</a:t>
+              <a:t>3 × 2,1</a:t>
             </a:r>
           </a:p>
         </p:txBody>
@@ -7607,7 +7607,7 @@
                   <a:schemeClr val="tx1"/>
                 </a:solidFill>
               </a:rPr>
-              <a:t>1.44</a:t>
+              <a:t>1,44</a:t>
             </a:r>
           </a:p>
         </p:txBody>
@@ -7643,7 +7643,7 @@
             <a:pPr algn="ctr"/>
             <a:r>
               <a:rPr lang="en-GB" sz="8800" dirty="0"/>
-              <a:t>1.2 × 1.2</a:t>
+              <a:t>1,2 × 1,2</a:t>
             </a:r>
           </a:p>
         </p:txBody>
@@ -7931,7 +7931,7 @@
                   <a:schemeClr val="tx1"/>
                 </a:solidFill>
               </a:rPr>
-              <a:t>0.42</a:t>
+              <a:t>0,42</a:t>
             </a:r>
           </a:p>
         </p:txBody>
@@ -7967,7 +7967,7 @@
             <a:pPr algn="ctr"/>
             <a:r>
               <a:rPr lang="en-GB" sz="8800" dirty="0"/>
-              <a:t>1.4 × 0.3</a:t>
+              <a:t>1,4 × 0,3</a:t>
             </a:r>
           </a:p>
         </p:txBody>
@@ -8255,7 +8255,7 @@
                   <a:schemeClr val="tx1"/>
                 </a:solidFill>
               </a:rPr>
-              <a:t>1.98</a:t>
+              <a:t>1,98</a:t>
             </a:r>
           </a:p>
         </p:txBody>
@@ -8291,7 +8291,7 @@
             <a:pPr algn="ctr"/>
             <a:r>
               <a:rPr lang="en-GB" sz="8800" dirty="0"/>
-              <a:t>1.1 × 1.8</a:t>
+              <a:t>1,1 × 1,8</a:t>
             </a:r>
           </a:p>
         </p:txBody>
@@ -18696,7 +18696,7 @@
                           <a:ea typeface="+mn-ea"/>
                           <a:cs typeface="+mn-cs"/>
                         </a:rPr>
-                        <a:t>0.42</a:t>
+                        <a:t>0,42</a:t>
                       </a:r>
                     </a:p>
                   </a:txBody>
@@ -18779,7 +18779,7 @@
                           <a:ea typeface="+mn-ea"/>
                           <a:cs typeface="+mn-cs"/>
                         </a:rPr>
-                        <a:t>9.6</a:t>
+                        <a:t>9,6</a:t>
                       </a:r>
                     </a:p>
                   </a:txBody>
@@ -18862,7 +18862,7 @@
                           <a:ea typeface="+mn-ea"/>
                           <a:cs typeface="+mn-cs"/>
                         </a:rPr>
-                        <a:t>2.8</a:t>
+                        <a:t>2,8</a:t>
                       </a:r>
                     </a:p>
                   </a:txBody>
@@ -18945,7 +18945,7 @@
                           <a:ea typeface="+mn-ea"/>
                           <a:cs typeface="+mn-cs"/>
                         </a:rPr>
-                        <a:t>0.18</a:t>
+                        <a:t>0,18</a:t>
                       </a:r>
                     </a:p>
                   </a:txBody>
@@ -19035,7 +19035,7 @@
                           <a:ea typeface="+mn-ea"/>
                           <a:cs typeface="+mn-cs"/>
                         </a:rPr>
-                        <a:t>5.2</a:t>
+                        <a:t>5,2</a:t>
                       </a:r>
                     </a:p>
                   </a:txBody>
@@ -19118,7 +19118,7 @@
                           <a:ea typeface="+mn-ea"/>
                           <a:cs typeface="+mn-cs"/>
                         </a:rPr>
-                        <a:t>0.16</a:t>
+                        <a:t>0,16</a:t>
                       </a:r>
                     </a:p>
                   </a:txBody>
@@ -19201,7 +19201,7 @@
                           <a:ea typeface="+mn-ea"/>
                           <a:cs typeface="+mn-cs"/>
                         </a:rPr>
-                        <a:t>0.64</a:t>
+                        <a:t>0,64</a:t>
                       </a:r>
                     </a:p>
                   </a:txBody>
@@ -19284,7 +19284,7 @@
                           <a:ea typeface="+mn-ea"/>
                           <a:cs typeface="+mn-cs"/>
                         </a:rPr>
-                        <a:t>2.1</a:t>
+                        <a:t>2,1</a:t>
                       </a:r>
                     </a:p>
                   </a:txBody>
@@ -19374,7 +19374,7 @@
                           <a:ea typeface="+mn-ea"/>
                           <a:cs typeface="+mn-cs"/>
                         </a:rPr>
-                        <a:t>1.98</a:t>
+                        <a:t>1,98</a:t>
                       </a:r>
                     </a:p>
                   </a:txBody>
@@ -19457,7 +19457,7 @@
                           <a:ea typeface="+mn-ea"/>
                           <a:cs typeface="+mn-cs"/>
                         </a:rPr>
-                        <a:t>4.8</a:t>
+                        <a:t>4,8</a:t>
                       </a:r>
                     </a:p>
                   </a:txBody>
@@ -19540,7 +19540,7 @@
                           <a:ea typeface="+mn-ea"/>
                           <a:cs typeface="+mn-cs"/>
                         </a:rPr>
-                        <a:t>1.8</a:t>
+                        <a:t>1,8</a:t>
                       </a:r>
                     </a:p>
                   </a:txBody>
@@ -19623,7 +19623,7 @@
                           <a:ea typeface="+mn-ea"/>
                           <a:cs typeface="+mn-cs"/>
                         </a:rPr>
-                        <a:t>0.92</a:t>
+                        <a:t>0,92</a:t>
                       </a:r>
                     </a:p>
                   </a:txBody>
@@ -19713,7 +19713,7 @@
                           <a:ea typeface="+mn-ea"/>
                           <a:cs typeface="+mn-cs"/>
                         </a:rPr>
-                        <a:t>6.3</a:t>
+                        <a:t>6,3</a:t>
                       </a:r>
                     </a:p>
                   </a:txBody>
@@ -19796,7 +19796,7 @@
                           <a:ea typeface="+mn-ea"/>
                           <a:cs typeface="+mn-cs"/>
                         </a:rPr>
-                        <a:t>0.84</a:t>
+                        <a:t>0,84</a:t>
                       </a:r>
                     </a:p>
                   </a:txBody>
@@ -19879,7 +19879,7 @@
                           <a:ea typeface="+mn-ea"/>
                           <a:cs typeface="+mn-cs"/>
                         </a:rPr>
-                        <a:t>1.44</a:t>
+                        <a:t>1,44</a:t>
                       </a:r>
                     </a:p>
                   </a:txBody>
@@ -19962,7 +19962,7 @@
                           <a:ea typeface="+mn-ea"/>
                           <a:cs typeface="+mn-cs"/>
                         </a:rPr>
-                        <a:t>8.4</a:t>
+                        <a:t>8,4</a:t>
                       </a:r>
                     </a:p>
                   </a:txBody>
@@ -21059,7 +21059,7 @@
                   <a:schemeClr val="tx1"/>
                 </a:solidFill>
               </a:rPr>
-              <a:t>4.8</a:t>
+              <a:t>4,8</a:t>
             </a:r>
           </a:p>
         </p:txBody>
@@ -21095,7 +21095,7 @@
             <a:pPr algn="ctr"/>
             <a:r>
               <a:rPr lang="en-GB" sz="8800" dirty="0"/>
-              <a:t>6 × 0.8</a:t>
+              <a:t>6 × 0,8</a:t>
             </a:r>
           </a:p>
         </p:txBody>
@@ -21383,7 +21383,7 @@
                   <a:schemeClr val="tx1"/>
                 </a:solidFill>
               </a:rPr>
-              <a:t>1.8</a:t>
+              <a:t>1,8</a:t>
             </a:r>
           </a:p>
         </p:txBody>
@@ -21419,7 +21419,7 @@
             <a:pPr algn="ctr"/>
             <a:r>
               <a:rPr lang="en-GB" sz="8800" dirty="0"/>
-              <a:t>0.2 × 9</a:t>
+              <a:t>0,2 × 9</a:t>
             </a:r>
           </a:p>
         </p:txBody>
@@ -21707,7 +21707,7 @@
                   <a:schemeClr val="tx1"/>
                 </a:solidFill>
               </a:rPr>
-              <a:t>2.1</a:t>
+              <a:t>2,1</a:t>
             </a:r>
           </a:p>
         </p:txBody>
@@ -21743,7 +21743,7 @@
             <a:pPr algn="ctr"/>
             <a:r>
               <a:rPr lang="en-GB" sz="8800" dirty="0"/>
-              <a:t>3 × 0.7</a:t>
+              <a:t>3 × 0,7</a:t>
             </a:r>
           </a:p>
         </p:txBody>
@@ -22031,7 +22031,7 @@
                   <a:schemeClr val="tx1"/>
                 </a:solidFill>
               </a:rPr>
-              <a:t>9.6</a:t>
+              <a:t>9,6</a:t>
             </a:r>
           </a:p>
         </p:txBody>
@@ -22067,7 +22067,7 @@
             <a:pPr algn="ctr"/>
             <a:r>
               <a:rPr lang="en-GB" sz="8800" dirty="0"/>
-              <a:t>8 × 1.2</a:t>
+              <a:t>8 × 1,2</a:t>
             </a:r>
           </a:p>
         </p:txBody>
@@ -22355,7 +22355,7 @@
                   <a:schemeClr val="tx1"/>
                 </a:solidFill>
               </a:rPr>
-              <a:t>5.2</a:t>
+              <a:t>5,2</a:t>
             </a:r>
           </a:p>
         </p:txBody>
@@ -22391,7 +22391,7 @@
             <a:pPr algn="ctr"/>
             <a:r>
               <a:rPr lang="en-GB" sz="8800" dirty="0"/>
-              <a:t>1.3 × 4</a:t>
+              <a:t>1,3 × 4</a:t>
             </a:r>
           </a:p>
         </p:txBody>
@@ -22679,7 +22679,7 @@
                   <a:schemeClr val="tx1"/>
                 </a:solidFill>
               </a:rPr>
-              <a:t>2.8</a:t>
+              <a:t>2,8</a:t>
             </a:r>
           </a:p>
         </p:txBody>
@@ -22715,7 +22715,7 @@
             <a:pPr algn="ctr"/>
             <a:r>
               <a:rPr lang="en-GB" sz="8800" dirty="0"/>
-              <a:t>0.7 × 4</a:t>
+              <a:t>0,7 × 4</a:t>
             </a:r>
           </a:p>
         </p:txBody>
